--- a/examples/out_branded.pptx
+++ b/examples/out_branded.pptx
@@ -3114,13 +3114,13 @@
         </p:spPr>
         <p:txBody>
           <a:bodyPr wrap="square" anchor="t" lIns="0" rIns="0" tIns="0" bIns="0">
-            <a:spAutoFit/>
+            <a:noAutofit/>
           </a:bodyPr>
           <a:lstStyle/>
           <a:p>
             <a:pPr algn="ctr"/>
             <a:r>
-              <a:rPr sz="3600" b="1">
+              <a:rPr sz="4800" b="1">
                 <a:solidFill>
                   <a:srgbClr val="000000"/>
                 </a:solidFill>
@@ -3149,7 +3149,7 @@
         </p:spPr>
         <p:txBody>
           <a:bodyPr wrap="square" anchor="t" lIns="0" rIns="0" tIns="0" bIns="0">
-            <a:spAutoFit/>
+            <a:noAutofit/>
           </a:bodyPr>
           <a:lstStyle/>
           <a:p>
@@ -3202,13 +3202,13 @@
         </p:spPr>
         <p:txBody>
           <a:bodyPr wrap="square" anchor="t" lIns="0" rIns="0" tIns="0" bIns="0">
-            <a:spAutoFit/>
+            <a:noAutofit/>
           </a:bodyPr>
           <a:lstStyle/>
           <a:p>
             <a:pPr algn="l"/>
             <a:r>
-              <a:rPr sz="3600" b="1">
+              <a:rPr sz="4800" b="1">
                 <a:solidFill>
                   <a:srgbClr val="000000"/>
                 </a:solidFill>
@@ -3237,13 +3237,13 @@
         </p:spPr>
         <p:txBody>
           <a:bodyPr wrap="square" anchor="t" lIns="0" rIns="0" tIns="0" bIns="0">
-            <a:spAutoFit/>
+            <a:noAutofit/>
           </a:bodyPr>
           <a:lstStyle/>
           <a:p>
             <a:pPr algn="l"/>
             <a:r>
-              <a:rPr sz="2400" b="1">
+              <a:rPr sz="2800" b="1">
                 <a:solidFill>
                   <a:srgbClr val="FD5108"/>
                 </a:solidFill>
@@ -3272,7 +3272,7 @@
         </p:spPr>
         <p:txBody>
           <a:bodyPr wrap="square" anchor="t" lIns="0" rIns="0" tIns="0" bIns="0">
-            <a:spAutoFit/>
+            <a:noAutofit/>
           </a:bodyPr>
           <a:lstStyle/>
           <a:p>
@@ -3282,7 +3282,7 @@
               </a:spcAft>
             </a:pPr>
             <a:r>
-              <a:rPr sz="1400" b="0">
+              <a:rPr sz="1500" b="0">
                 <a:solidFill>
                   <a:srgbClr val="000000"/>
                 </a:solidFill>
@@ -3298,7 +3298,7 @@
               </a:spcAft>
             </a:pPr>
             <a:r>
-              <a:rPr sz="1400" b="0">
+              <a:rPr sz="1500" b="0">
                 <a:solidFill>
                   <a:srgbClr val="000000"/>
                 </a:solidFill>
@@ -3314,7 +3314,7 @@
               </a:spcAft>
             </a:pPr>
             <a:r>
-              <a:rPr sz="1400" b="0">
+              <a:rPr sz="1500" b="0">
                 <a:solidFill>
                   <a:srgbClr val="000000"/>
                 </a:solidFill>
@@ -3765,13 +3765,13 @@
         </p:spPr>
         <p:txBody>
           <a:bodyPr wrap="square" anchor="t" lIns="0" rIns="0" tIns="0" bIns="0">
-            <a:spAutoFit/>
+            <a:noAutofit/>
           </a:bodyPr>
           <a:lstStyle/>
           <a:p>
             <a:pPr algn="l"/>
             <a:r>
-              <a:rPr sz="3600" b="1">
+              <a:rPr sz="4800" b="1">
                 <a:solidFill>
                   <a:srgbClr val="000000"/>
                 </a:solidFill>
@@ -3800,13 +3800,13 @@
         </p:spPr>
         <p:txBody>
           <a:bodyPr wrap="square" anchor="t" lIns="0" rIns="0" tIns="0" bIns="0">
-            <a:spAutoFit/>
+            <a:noAutofit/>
           </a:bodyPr>
           <a:lstStyle/>
           <a:p>
             <a:pPr algn="l"/>
             <a:r>
-              <a:rPr sz="2400" b="1">
+              <a:rPr sz="2800" b="1">
                 <a:solidFill>
                   <a:srgbClr val="FD5108"/>
                 </a:solidFill>
@@ -3835,7 +3835,7 @@
         </p:spPr>
         <p:txBody>
           <a:bodyPr wrap="square" anchor="t" lIns="0" rIns="0" tIns="0" bIns="0">
-            <a:spAutoFit/>
+            <a:noAutofit/>
           </a:bodyPr>
           <a:lstStyle/>
           <a:p>
@@ -3845,7 +3845,7 @@
               </a:spcAft>
             </a:pPr>
             <a:r>
-              <a:rPr sz="1400" b="0">
+              <a:rPr sz="1500" b="0">
                 <a:solidFill>
                   <a:srgbClr val="000000"/>
                 </a:solidFill>
@@ -3861,7 +3861,7 @@
               </a:spcAft>
             </a:pPr>
             <a:r>
-              <a:rPr sz="1400" b="0">
+              <a:rPr sz="1500" b="0">
                 <a:solidFill>
                   <a:srgbClr val="000000"/>
                 </a:solidFill>
@@ -3877,7 +3877,7 @@
               </a:spcAft>
             </a:pPr>
             <a:r>
-              <a:rPr sz="1400" b="0">
+              <a:rPr sz="1500" b="0">
                 <a:solidFill>
                   <a:srgbClr val="000000"/>
                 </a:solidFill>
@@ -4328,13 +4328,13 @@
         </p:spPr>
         <p:txBody>
           <a:bodyPr wrap="square" anchor="t" lIns="0" rIns="0" tIns="0" bIns="0">
-            <a:spAutoFit/>
+            <a:noAutofit/>
           </a:bodyPr>
           <a:lstStyle/>
           <a:p>
             <a:pPr algn="l"/>
             <a:r>
-              <a:rPr sz="3600" b="1">
+              <a:rPr sz="4800" b="1">
                 <a:solidFill>
                   <a:srgbClr val="000000"/>
                 </a:solidFill>
@@ -4847,13 +4847,13 @@
         </p:spPr>
         <p:txBody>
           <a:bodyPr wrap="square" anchor="t" lIns="0" rIns="0" tIns="0" bIns="0">
-            <a:spAutoFit/>
+            <a:noAutofit/>
           </a:bodyPr>
           <a:lstStyle/>
           <a:p>
             <a:pPr algn="l"/>
             <a:r>
-              <a:rPr sz="3600" b="1">
+              <a:rPr sz="4800" b="1">
                 <a:solidFill>
                   <a:srgbClr val="000000"/>
                 </a:solidFill>
@@ -5468,13 +5468,13 @@
         </p:spPr>
         <p:txBody>
           <a:bodyPr wrap="square" anchor="t" lIns="0" rIns="0" tIns="0" bIns="0">
-            <a:spAutoFit/>
+            <a:noAutofit/>
           </a:bodyPr>
           <a:lstStyle/>
           <a:p>
             <a:pPr algn="l"/>
             <a:r>
-              <a:rPr sz="3600" b="1">
+              <a:rPr sz="4800" b="1">
                 <a:solidFill>
                   <a:srgbClr val="000000"/>
                 </a:solidFill>
@@ -5558,7 +5558,7 @@
         </p:spPr>
         <p:txBody>
           <a:bodyPr wrap="square" anchor="t" lIns="0" rIns="0" tIns="0" bIns="0">
-            <a:spAutoFit/>
+            <a:noAutofit/>
           </a:bodyPr>
           <a:lstStyle/>
           <a:p>
@@ -5593,7 +5593,7 @@
         </p:spPr>
         <p:txBody>
           <a:bodyPr wrap="square" anchor="t" lIns="0" rIns="0" tIns="0" bIns="0">
-            <a:spAutoFit/>
+            <a:noAutofit/>
           </a:bodyPr>
           <a:lstStyle/>
           <a:p>
@@ -5628,13 +5628,13 @@
         </p:spPr>
         <p:txBody>
           <a:bodyPr wrap="square" anchor="t" lIns="0" rIns="0" tIns="0" bIns="0">
-            <a:spAutoFit/>
+            <a:noAutofit/>
           </a:bodyPr>
           <a:lstStyle/>
           <a:p>
             <a:pPr algn="l"/>
             <a:r>
-              <a:rPr sz="1400" b="0">
+              <a:rPr sz="1500" b="0">
                 <a:solidFill>
                   <a:srgbClr val="000000"/>
                 </a:solidFill>
@@ -5718,7 +5718,7 @@
         </p:spPr>
         <p:txBody>
           <a:bodyPr wrap="square" anchor="t" lIns="0" rIns="0" tIns="0" bIns="0">
-            <a:spAutoFit/>
+            <a:noAutofit/>
           </a:bodyPr>
           <a:lstStyle/>
           <a:p>
@@ -5753,7 +5753,7 @@
         </p:spPr>
         <p:txBody>
           <a:bodyPr wrap="square" anchor="t" lIns="0" rIns="0" tIns="0" bIns="0">
-            <a:spAutoFit/>
+            <a:noAutofit/>
           </a:bodyPr>
           <a:lstStyle/>
           <a:p>
@@ -5788,13 +5788,13 @@
         </p:spPr>
         <p:txBody>
           <a:bodyPr wrap="square" anchor="t" lIns="0" rIns="0" tIns="0" bIns="0">
-            <a:spAutoFit/>
+            <a:noAutofit/>
           </a:bodyPr>
           <a:lstStyle/>
           <a:p>
             <a:pPr algn="l"/>
             <a:r>
-              <a:rPr sz="1400" b="0">
+              <a:rPr sz="1500" b="0">
                 <a:solidFill>
                   <a:srgbClr val="000000"/>
                 </a:solidFill>
@@ -5878,7 +5878,7 @@
         </p:spPr>
         <p:txBody>
           <a:bodyPr wrap="square" anchor="t" lIns="0" rIns="0" tIns="0" bIns="0">
-            <a:spAutoFit/>
+            <a:noAutofit/>
           </a:bodyPr>
           <a:lstStyle/>
           <a:p>
@@ -5913,7 +5913,7 @@
         </p:spPr>
         <p:txBody>
           <a:bodyPr wrap="square" anchor="t" lIns="0" rIns="0" tIns="0" bIns="0">
-            <a:spAutoFit/>
+            <a:noAutofit/>
           </a:bodyPr>
           <a:lstStyle/>
           <a:p>
@@ -5948,13 +5948,13 @@
         </p:spPr>
         <p:txBody>
           <a:bodyPr wrap="square" anchor="t" lIns="0" rIns="0" tIns="0" bIns="0">
-            <a:spAutoFit/>
+            <a:noAutofit/>
           </a:bodyPr>
           <a:lstStyle/>
           <a:p>
             <a:pPr algn="l"/>
             <a:r>
-              <a:rPr sz="1400" b="0">
+              <a:rPr sz="1500" b="0">
                 <a:solidFill>
                   <a:srgbClr val="000000"/>
                 </a:solidFill>
@@ -6038,7 +6038,7 @@
         </p:spPr>
         <p:txBody>
           <a:bodyPr wrap="square" anchor="t" lIns="0" rIns="0" tIns="0" bIns="0">
-            <a:spAutoFit/>
+            <a:noAutofit/>
           </a:bodyPr>
           <a:lstStyle/>
           <a:p>
@@ -6073,7 +6073,7 @@
         </p:spPr>
         <p:txBody>
           <a:bodyPr wrap="square" anchor="t" lIns="0" rIns="0" tIns="0" bIns="0">
-            <a:spAutoFit/>
+            <a:noAutofit/>
           </a:bodyPr>
           <a:lstStyle/>
           <a:p>
@@ -6108,13 +6108,13 @@
         </p:spPr>
         <p:txBody>
           <a:bodyPr wrap="square" anchor="t" lIns="0" rIns="0" tIns="0" bIns="0">
-            <a:spAutoFit/>
+            <a:noAutofit/>
           </a:bodyPr>
           <a:lstStyle/>
           <a:p>
             <a:pPr algn="l"/>
             <a:r>
-              <a:rPr sz="1400" b="0">
+              <a:rPr sz="1500" b="0">
                 <a:solidFill>
                   <a:srgbClr val="000000"/>
                 </a:solidFill>
@@ -6161,13 +6161,13 @@
         </p:spPr>
         <p:txBody>
           <a:bodyPr wrap="square" anchor="t" lIns="0" rIns="0" tIns="0" bIns="0">
-            <a:spAutoFit/>
+            <a:noAutofit/>
           </a:bodyPr>
           <a:lstStyle/>
           <a:p>
             <a:pPr algn="l"/>
             <a:r>
-              <a:rPr sz="3600" b="1">
+              <a:rPr sz="4800" b="1">
                 <a:solidFill>
                   <a:srgbClr val="000000"/>
                 </a:solidFill>
@@ -6251,7 +6251,7 @@
         </p:spPr>
         <p:txBody>
           <a:bodyPr wrap="square" anchor="t" lIns="0" rIns="0" tIns="0" bIns="0">
-            <a:spAutoFit/>
+            <a:noAutofit/>
           </a:bodyPr>
           <a:lstStyle/>
           <a:p>
@@ -6286,7 +6286,7 @@
         </p:spPr>
         <p:txBody>
           <a:bodyPr wrap="square" anchor="t" lIns="0" rIns="0" tIns="0" bIns="0">
-            <a:spAutoFit/>
+            <a:noAutofit/>
           </a:bodyPr>
           <a:lstStyle/>
           <a:p>
@@ -6321,13 +6321,13 @@
         </p:spPr>
         <p:txBody>
           <a:bodyPr wrap="square" anchor="t" lIns="0" rIns="0" tIns="0" bIns="0">
-            <a:spAutoFit/>
+            <a:noAutofit/>
           </a:bodyPr>
           <a:lstStyle/>
           <a:p>
             <a:pPr algn="l"/>
             <a:r>
-              <a:rPr sz="1400" b="0">
+              <a:rPr sz="1500" b="0">
                 <a:solidFill>
                   <a:srgbClr val="000000"/>
                 </a:solidFill>
@@ -6411,7 +6411,7 @@
         </p:spPr>
         <p:txBody>
           <a:bodyPr wrap="square" anchor="t" lIns="0" rIns="0" tIns="0" bIns="0">
-            <a:spAutoFit/>
+            <a:noAutofit/>
           </a:bodyPr>
           <a:lstStyle/>
           <a:p>
@@ -6446,7 +6446,7 @@
         </p:spPr>
         <p:txBody>
           <a:bodyPr wrap="square" anchor="t" lIns="0" rIns="0" tIns="0" bIns="0">
-            <a:spAutoFit/>
+            <a:noAutofit/>
           </a:bodyPr>
           <a:lstStyle/>
           <a:p>
@@ -6481,13 +6481,13 @@
         </p:spPr>
         <p:txBody>
           <a:bodyPr wrap="square" anchor="t" lIns="0" rIns="0" tIns="0" bIns="0">
-            <a:spAutoFit/>
+            <a:noAutofit/>
           </a:bodyPr>
           <a:lstStyle/>
           <a:p>
             <a:pPr algn="l"/>
             <a:r>
-              <a:rPr sz="1400" b="0">
+              <a:rPr sz="1500" b="0">
                 <a:solidFill>
                   <a:srgbClr val="000000"/>
                 </a:solidFill>
@@ -6571,7 +6571,7 @@
         </p:spPr>
         <p:txBody>
           <a:bodyPr wrap="square" anchor="t" lIns="0" rIns="0" tIns="0" bIns="0">
-            <a:spAutoFit/>
+            <a:noAutofit/>
           </a:bodyPr>
           <a:lstStyle/>
           <a:p>
@@ -6606,7 +6606,7 @@
         </p:spPr>
         <p:txBody>
           <a:bodyPr wrap="square" anchor="t" lIns="0" rIns="0" tIns="0" bIns="0">
-            <a:spAutoFit/>
+            <a:noAutofit/>
           </a:bodyPr>
           <a:lstStyle/>
           <a:p>
@@ -6641,13 +6641,13 @@
         </p:spPr>
         <p:txBody>
           <a:bodyPr wrap="square" anchor="t" lIns="0" rIns="0" tIns="0" bIns="0">
-            <a:spAutoFit/>
+            <a:noAutofit/>
           </a:bodyPr>
           <a:lstStyle/>
           <a:p>
             <a:pPr algn="l"/>
             <a:r>
-              <a:rPr sz="1400" b="0">
+              <a:rPr sz="1500" b="0">
                 <a:solidFill>
                   <a:srgbClr val="000000"/>
                 </a:solidFill>
@@ -6731,7 +6731,7 @@
         </p:spPr>
         <p:txBody>
           <a:bodyPr wrap="square" anchor="t" lIns="0" rIns="0" tIns="0" bIns="0">
-            <a:spAutoFit/>
+            <a:noAutofit/>
           </a:bodyPr>
           <a:lstStyle/>
           <a:p>
@@ -6766,7 +6766,7 @@
         </p:spPr>
         <p:txBody>
           <a:bodyPr wrap="square" anchor="t" lIns="0" rIns="0" tIns="0" bIns="0">
-            <a:spAutoFit/>
+            <a:noAutofit/>
           </a:bodyPr>
           <a:lstStyle/>
           <a:p>
@@ -6801,13 +6801,13 @@
         </p:spPr>
         <p:txBody>
           <a:bodyPr wrap="square" anchor="t" lIns="0" rIns="0" tIns="0" bIns="0">
-            <a:spAutoFit/>
+            <a:noAutofit/>
           </a:bodyPr>
           <a:lstStyle/>
           <a:p>
             <a:pPr algn="l"/>
             <a:r>
-              <a:rPr sz="1400" b="0">
+              <a:rPr sz="1500" b="0">
                 <a:solidFill>
                   <a:srgbClr val="000000"/>
                 </a:solidFill>
@@ -6854,13 +6854,13 @@
         </p:spPr>
         <p:txBody>
           <a:bodyPr wrap="square" anchor="t" lIns="0" rIns="0" tIns="0" bIns="0">
-            <a:spAutoFit/>
+            <a:noAutofit/>
           </a:bodyPr>
           <a:lstStyle/>
           <a:p>
             <a:pPr algn="l"/>
             <a:r>
-              <a:rPr sz="3600" b="1">
+              <a:rPr sz="4800" b="1">
                 <a:solidFill>
                   <a:srgbClr val="000000"/>
                 </a:solidFill>
@@ -7259,13 +7259,13 @@
         </p:spPr>
         <p:txBody>
           <a:bodyPr wrap="square" anchor="t" lIns="0" rIns="0" tIns="0" bIns="0">
-            <a:spAutoFit/>
+            <a:noAutofit/>
           </a:bodyPr>
           <a:lstStyle/>
           <a:p>
             <a:pPr algn="ctr"/>
             <a:r>
-              <a:rPr sz="3600" b="1">
+              <a:rPr sz="4800" b="1">
                 <a:solidFill>
                   <a:srgbClr val="000000"/>
                 </a:solidFill>
@@ -7278,7 +7278,7 @@
       </p:sp>
       <p:sp>
         <p:nvSpPr>
-          <p:cNvPr id="3" name="Rounded Rectangle 2"/>
+          <p:cNvPr id="3" name="Rectangle 2"/>
           <p:cNvSpPr/>
           <p:nvPr/>
         </p:nvSpPr>
@@ -7287,7 +7287,7 @@
             <a:off x="4220202" y="3429000"/>
             <a:ext cx="3751290" cy="979714"/>
           </a:xfrm>
-          <a:prstGeom prst="roundRect">
+          <a:prstGeom prst="rect">
             <a:avLst/>
           </a:prstGeom>
           <a:solidFill>
@@ -7346,7 +7346,7 @@
         </p:spPr>
         <p:txBody>
           <a:bodyPr wrap="square" anchor="t" lIns="0" rIns="0" tIns="0" bIns="0">
-            <a:spAutoFit/>
+            <a:noAutofit/>
           </a:bodyPr>
           <a:lstStyle/>
           <a:p>
